--- a/Slides/Semana 8/semana_8_slides.pptx
+++ b/Slides/Semana 8/semana_8_slides.pptx
@@ -1152,7 +1152,7 @@
 - "Se tivéssemos que mostrar algo concreto hoje, o que já existe?"
 - "Quem depende deste material para começar o próprio trabalho?"
 Avaliação nesta semana: início do ciclo de observação da Etapa de Preparação (Semanas 8–11), segundo a Rubrica de Avaliação. Observa-se Gestão do Projeto (transformação do planejamento em lista organizada de produção, com responsáveis e prazos), Trabalho em Equipe (distribuição equilibrada das responsabilidades) e, indiretamente, Planejamento (suficiência do Plano Completo da Semana 7 para orientar a produção).
-Fonte: Plano Semanal Semana 8, Cronograma, CLAUDE.md, COURSE_CONTEXT.md, PEDAGOGICAL_RULES.md, EXTENSION_PROJECT_GUIDE.md.</a:t>
+Fonte: Plano Semanal Semana 8, Cronograma.</a:t>
             </a:r>
             <a:endParaRPr lang="en-US" dirty="0"/>
           </a:p>
